--- a/EVGEN2026/assets/images/EVGEN 2025 Logo.pptx
+++ b/EVGEN2026/assets/images/EVGEN 2025 Logo.pptx
@@ -6,6 +6,7 @@
   </p:sldMasterIdLst>
   <p:sldIdLst>
     <p:sldId id="256" r:id="rId2"/>
+    <p:sldId id="257" r:id="rId3"/>
   </p:sldIdLst>
   <p:sldSz cx="12192000" cy="6858000"/>
   <p:notesSz cx="6858000" cy="9144000"/>
@@ -104,6 +105,11 @@
       </a:defRPr>
     </a:lvl9pPr>
   </p:defaultTextStyle>
+  <p:extLst>
+    <p:ext uri="{EFAFB233-063F-42B5-8137-9DF3F51BA10A}">
+      <p15:sldGuideLst xmlns:p15="http://schemas.microsoft.com/office/powerpoint/2012/main"/>
+    </p:ext>
+  </p:extLst>
 </p:presentation>
 </file>
 
@@ -254,7 +260,7 @@
           <a:p>
             <a:fld id="{E3B099B0-182E-42D8-85A9-8F6478233CBF}" type="datetimeFigureOut">
               <a:rPr lang="en-US" smtClean="0"/>
-              <a:t>10/4/2024</a:t>
+              <a:t>3/2/2026</a:t>
             </a:fld>
             <a:endParaRPr lang="en-US"/>
           </a:p>
@@ -452,7 +458,7 @@
           <a:p>
             <a:fld id="{E3B099B0-182E-42D8-85A9-8F6478233CBF}" type="datetimeFigureOut">
               <a:rPr lang="en-US" smtClean="0"/>
-              <a:t>10/4/2024</a:t>
+              <a:t>3/2/2026</a:t>
             </a:fld>
             <a:endParaRPr lang="en-US"/>
           </a:p>
@@ -660,7 +666,7 @@
           <a:p>
             <a:fld id="{E3B099B0-182E-42D8-85A9-8F6478233CBF}" type="datetimeFigureOut">
               <a:rPr lang="en-US" smtClean="0"/>
-              <a:t>10/4/2024</a:t>
+              <a:t>3/2/2026</a:t>
             </a:fld>
             <a:endParaRPr lang="en-US"/>
           </a:p>
@@ -858,7 +864,7 @@
           <a:p>
             <a:fld id="{E3B099B0-182E-42D8-85A9-8F6478233CBF}" type="datetimeFigureOut">
               <a:rPr lang="en-US" smtClean="0"/>
-              <a:t>10/4/2024</a:t>
+              <a:t>3/2/2026</a:t>
             </a:fld>
             <a:endParaRPr lang="en-US"/>
           </a:p>
@@ -1133,7 +1139,7 @@
           <a:p>
             <a:fld id="{E3B099B0-182E-42D8-85A9-8F6478233CBF}" type="datetimeFigureOut">
               <a:rPr lang="en-US" smtClean="0"/>
-              <a:t>10/4/2024</a:t>
+              <a:t>3/2/2026</a:t>
             </a:fld>
             <a:endParaRPr lang="en-US"/>
           </a:p>
@@ -1398,7 +1404,7 @@
           <a:p>
             <a:fld id="{E3B099B0-182E-42D8-85A9-8F6478233CBF}" type="datetimeFigureOut">
               <a:rPr lang="en-US" smtClean="0"/>
-              <a:t>10/4/2024</a:t>
+              <a:t>3/2/2026</a:t>
             </a:fld>
             <a:endParaRPr lang="en-US"/>
           </a:p>
@@ -1810,7 +1816,7 @@
           <a:p>
             <a:fld id="{E3B099B0-182E-42D8-85A9-8F6478233CBF}" type="datetimeFigureOut">
               <a:rPr lang="en-US" smtClean="0"/>
-              <a:t>10/4/2024</a:t>
+              <a:t>3/2/2026</a:t>
             </a:fld>
             <a:endParaRPr lang="en-US"/>
           </a:p>
@@ -1951,7 +1957,7 @@
           <a:p>
             <a:fld id="{E3B099B0-182E-42D8-85A9-8F6478233CBF}" type="datetimeFigureOut">
               <a:rPr lang="en-US" smtClean="0"/>
-              <a:t>10/4/2024</a:t>
+              <a:t>3/2/2026</a:t>
             </a:fld>
             <a:endParaRPr lang="en-US"/>
           </a:p>
@@ -2064,7 +2070,7 @@
           <a:p>
             <a:fld id="{E3B099B0-182E-42D8-85A9-8F6478233CBF}" type="datetimeFigureOut">
               <a:rPr lang="en-US" smtClean="0"/>
-              <a:t>10/4/2024</a:t>
+              <a:t>3/2/2026</a:t>
             </a:fld>
             <a:endParaRPr lang="en-US"/>
           </a:p>
@@ -2375,7 +2381,7 @@
           <a:p>
             <a:fld id="{E3B099B0-182E-42D8-85A9-8F6478233CBF}" type="datetimeFigureOut">
               <a:rPr lang="en-US" smtClean="0"/>
-              <a:t>10/4/2024</a:t>
+              <a:t>3/2/2026</a:t>
             </a:fld>
             <a:endParaRPr lang="en-US"/>
           </a:p>
@@ -2663,7 +2669,7 @@
           <a:p>
             <a:fld id="{E3B099B0-182E-42D8-85A9-8F6478233CBF}" type="datetimeFigureOut">
               <a:rPr lang="en-US" smtClean="0"/>
-              <a:t>10/4/2024</a:t>
+              <a:t>3/2/2026</a:t>
             </a:fld>
             <a:endParaRPr lang="en-US"/>
           </a:p>
@@ -2904,7 +2910,7 @@
           <a:p>
             <a:fld id="{E3B099B0-182E-42D8-85A9-8F6478233CBF}" type="datetimeFigureOut">
               <a:rPr lang="en-US" smtClean="0"/>
-              <a:t>10/4/2024</a:t>
+              <a:t>3/2/2026</a:t>
             </a:fld>
             <a:endParaRPr lang="en-US"/>
           </a:p>
@@ -3693,6 +3699,399 @@
 </p:sld>
 </file>
 
+<file path=ppt/slides/slide2.xml><?xml version="1.0" encoding="utf-8"?>
+<p:sld xmlns:a="http://schemas.openxmlformats.org/drawingml/2006/main" xmlns:r="http://schemas.openxmlformats.org/officeDocument/2006/relationships" xmlns:p="http://schemas.openxmlformats.org/presentationml/2006/main">
+  <p:cSld>
+    <p:spTree>
+      <p:nvGrpSpPr>
+        <p:cNvPr id="1" name="">
+          <a:extLst>
+            <a:ext uri="{FF2B5EF4-FFF2-40B4-BE49-F238E27FC236}">
+              <a16:creationId xmlns:a16="http://schemas.microsoft.com/office/drawing/2014/main" id="{3040F43B-A16D-2C85-66FE-EB808C038970}"/>
+            </a:ext>
+          </a:extLst>
+        </p:cNvPr>
+        <p:cNvGrpSpPr/>
+        <p:nvPr/>
+      </p:nvGrpSpPr>
+      <p:grpSpPr>
+        <a:xfrm>
+          <a:off x="0" y="0"/>
+          <a:ext cx="0" cy="0"/>
+          <a:chOff x="0" y="0"/>
+          <a:chExt cx="0" cy="0"/>
+        </a:xfrm>
+      </p:grpSpPr>
+      <p:grpSp>
+        <p:nvGrpSpPr>
+          <p:cNvPr id="11" name="Group 10">
+            <a:extLst>
+              <a:ext uri="{FF2B5EF4-FFF2-40B4-BE49-F238E27FC236}">
+                <a16:creationId xmlns:a16="http://schemas.microsoft.com/office/drawing/2014/main" id="{7EC8E067-B2BE-750E-B352-A99C7FDE6977}"/>
+              </a:ext>
+            </a:extLst>
+          </p:cNvPr>
+          <p:cNvGrpSpPr/>
+          <p:nvPr/>
+        </p:nvGrpSpPr>
+        <p:grpSpPr>
+          <a:xfrm>
+            <a:off x="2960500" y="1505188"/>
+            <a:ext cx="2433080" cy="3331739"/>
+            <a:chOff x="4580074" y="1404449"/>
+            <a:chExt cx="2433080" cy="3331739"/>
+          </a:xfrm>
+        </p:grpSpPr>
+        <p:pic>
+          <p:nvPicPr>
+            <p:cNvPr id="7" name="Picture 6" descr="A person on a bicycle&#10;&#10;Description automatically generated">
+              <a:extLst>
+                <a:ext uri="{FF2B5EF4-FFF2-40B4-BE49-F238E27FC236}">
+                  <a16:creationId xmlns:a16="http://schemas.microsoft.com/office/drawing/2014/main" id="{7EDC832D-45BF-B6BF-C3F9-5D15F9E1F0DD}"/>
+                </a:ext>
+              </a:extLst>
+            </p:cNvPr>
+            <p:cNvPicPr>
+              <a:picLocks noChangeAspect="1"/>
+            </p:cNvPicPr>
+            <p:nvPr/>
+          </p:nvPicPr>
+          <p:blipFill>
+            <a:blip r:embed="rId2">
+              <a:extLst>
+                <a:ext uri="{28A0092B-C50C-407E-A947-70E740481C1C}">
+                  <a14:useLocalDpi xmlns:a14="http://schemas.microsoft.com/office/drawing/2010/main" val="0"/>
+                </a:ext>
+              </a:extLst>
+            </a:blip>
+            <a:stretch>
+              <a:fillRect/>
+            </a:stretch>
+          </p:blipFill>
+          <p:spPr>
+            <a:xfrm>
+              <a:off x="5127204" y="2151422"/>
+              <a:ext cx="1885950" cy="1885950"/>
+            </a:xfrm>
+            <a:prstGeom prst="rect">
+              <a:avLst/>
+            </a:prstGeom>
+          </p:spPr>
+        </p:pic>
+        <p:pic>
+          <p:nvPicPr>
+            <p:cNvPr id="1026" name="Picture 2">
+              <a:extLst>
+                <a:ext uri="{FF2B5EF4-FFF2-40B4-BE49-F238E27FC236}">
+                  <a16:creationId xmlns:a16="http://schemas.microsoft.com/office/drawing/2014/main" id="{356A6851-BD60-C1B1-7396-6BE9816A2D0F}"/>
+                </a:ext>
+              </a:extLst>
+            </p:cNvPr>
+            <p:cNvPicPr>
+              <a:picLocks noChangeAspect="1" noChangeArrowheads="1"/>
+            </p:cNvPicPr>
+            <p:nvPr/>
+          </p:nvPicPr>
+          <p:blipFill>
+            <a:blip r:embed="rId3">
+              <a:extLst>
+                <a:ext uri="{28A0092B-C50C-407E-A947-70E740481C1C}">
+                  <a14:useLocalDpi xmlns:a14="http://schemas.microsoft.com/office/drawing/2010/main" val="0"/>
+                </a:ext>
+              </a:extLst>
+            </a:blip>
+            <a:srcRect/>
+            <a:stretch/>
+          </p:blipFill>
+          <p:spPr bwMode="auto">
+            <a:xfrm>
+              <a:off x="4580075" y="1404449"/>
+              <a:ext cx="2433079" cy="745488"/>
+            </a:xfrm>
+            <a:prstGeom prst="rect">
+              <a:avLst/>
+            </a:prstGeom>
+            <a:noFill/>
+            <a:extLst>
+              <a:ext uri="{909E8E84-426E-40DD-AFC4-6F175D3DCCD1}">
+                <a14:hiddenFill xmlns:a14="http://schemas.microsoft.com/office/drawing/2010/main">
+                  <a:solidFill>
+                    <a:srgbClr val="FFFFFF"/>
+                  </a:solidFill>
+                </a14:hiddenFill>
+              </a:ext>
+            </a:extLst>
+          </p:spPr>
+        </p:pic>
+        <p:sp>
+          <p:nvSpPr>
+            <p:cNvPr id="8" name="TextBox 7">
+              <a:extLst>
+                <a:ext uri="{FF2B5EF4-FFF2-40B4-BE49-F238E27FC236}">
+                  <a16:creationId xmlns:a16="http://schemas.microsoft.com/office/drawing/2014/main" id="{B8F4E467-B632-E69A-CA93-77E94F386ABA}"/>
+                </a:ext>
+              </a:extLst>
+            </p:cNvPr>
+            <p:cNvSpPr txBox="1"/>
+            <p:nvPr/>
+          </p:nvSpPr>
+          <p:spPr>
+            <a:xfrm>
+              <a:off x="4580075" y="2261886"/>
+              <a:ext cx="861774" cy="1698542"/>
+            </a:xfrm>
+            <a:prstGeom prst="rect">
+              <a:avLst/>
+            </a:prstGeom>
+            <a:noFill/>
+          </p:spPr>
+          <p:txBody>
+            <a:bodyPr vert="vert270" wrap="none" rtlCol="0">
+              <a:spAutoFit/>
+            </a:bodyPr>
+            <a:lstStyle/>
+            <a:p>
+              <a:pPr algn="ctr"/>
+              <a:r>
+                <a:rPr lang="en-US" sz="4400" b="1" dirty="0">
+                  <a:latin typeface="Trade Gothic Inline" panose="020F0502020204030204" pitchFamily="34" charset="0"/>
+                </a:rPr>
+                <a:t>EVGEN</a:t>
+              </a:r>
+            </a:p>
+          </p:txBody>
+        </p:sp>
+        <p:sp>
+          <p:nvSpPr>
+            <p:cNvPr id="9" name="TextBox 8">
+              <a:extLst>
+                <a:ext uri="{FF2B5EF4-FFF2-40B4-BE49-F238E27FC236}">
+                  <a16:creationId xmlns:a16="http://schemas.microsoft.com/office/drawing/2014/main" id="{FBB3B327-FB14-57AD-BFE6-2B9ED503E46D}"/>
+                </a:ext>
+              </a:extLst>
+            </p:cNvPr>
+            <p:cNvSpPr txBox="1"/>
+            <p:nvPr/>
+          </p:nvSpPr>
+          <p:spPr>
+            <a:xfrm rot="5400000">
+              <a:off x="5350338" y="3073372"/>
+              <a:ext cx="892552" cy="2433079"/>
+            </a:xfrm>
+            <a:prstGeom prst="rect">
+              <a:avLst/>
+            </a:prstGeom>
+            <a:noFill/>
+          </p:spPr>
+          <p:txBody>
+            <a:bodyPr vert="vert270" wrap="square" rtlCol="0">
+              <a:spAutoFit/>
+            </a:bodyPr>
+            <a:lstStyle/>
+            <a:p>
+              <a:pPr algn="ctr"/>
+              <a:r>
+                <a:rPr lang="en-US" sz="2300" dirty="0">
+                  <a:latin typeface="Bahnschrift SemiBold Condensed" panose="020B0502040204020203" pitchFamily="34" charset="0"/>
+                </a:rPr>
+                <a:t>Event-based Vision in the Era of Generative AI</a:t>
+              </a:r>
+            </a:p>
+          </p:txBody>
+        </p:sp>
+      </p:grpSp>
+      <p:grpSp>
+        <p:nvGrpSpPr>
+          <p:cNvPr id="17" name="Group 16">
+            <a:extLst>
+              <a:ext uri="{FF2B5EF4-FFF2-40B4-BE49-F238E27FC236}">
+                <a16:creationId xmlns:a16="http://schemas.microsoft.com/office/drawing/2014/main" id="{7E0B5B2A-2021-0257-DED4-DA200E401E1C}"/>
+              </a:ext>
+            </a:extLst>
+          </p:cNvPr>
+          <p:cNvGrpSpPr/>
+          <p:nvPr/>
+        </p:nvGrpSpPr>
+        <p:grpSpPr>
+          <a:xfrm>
+            <a:off x="6501095" y="1503704"/>
+            <a:ext cx="2528457" cy="3333223"/>
+            <a:chOff x="8205909" y="1402965"/>
+            <a:chExt cx="2528457" cy="3333223"/>
+          </a:xfrm>
+        </p:grpSpPr>
+        <p:pic>
+          <p:nvPicPr>
+            <p:cNvPr id="13" name="Picture 12" descr="A horse running in a field&#10;&#10;Description automatically generated">
+              <a:extLst>
+                <a:ext uri="{FF2B5EF4-FFF2-40B4-BE49-F238E27FC236}">
+                  <a16:creationId xmlns:a16="http://schemas.microsoft.com/office/drawing/2014/main" id="{FC3751DA-294E-6BEB-6AEE-FAFB977299E4}"/>
+                </a:ext>
+              </a:extLst>
+            </p:cNvPr>
+            <p:cNvPicPr>
+              <a:picLocks noChangeAspect="1"/>
+            </p:cNvPicPr>
+            <p:nvPr/>
+          </p:nvPicPr>
+          <p:blipFill rotWithShape="1">
+            <a:blip r:embed="rId4">
+              <a:extLst>
+                <a:ext uri="{28A0092B-C50C-407E-A947-70E740481C1C}">
+                  <a14:useLocalDpi xmlns:a14="http://schemas.microsoft.com/office/drawing/2010/main" val="0"/>
+                </a:ext>
+              </a:extLst>
+            </a:blip>
+            <a:srcRect l="14096" t="30937" r="26869" b="6970"/>
+            <a:stretch/>
+          </p:blipFill>
+          <p:spPr>
+            <a:xfrm>
+              <a:off x="8972306" y="2327518"/>
+              <a:ext cx="1762060" cy="1567277"/>
+            </a:xfrm>
+            <a:prstGeom prst="rect">
+              <a:avLst/>
+            </a:prstGeom>
+          </p:spPr>
+        </p:pic>
+        <p:pic>
+          <p:nvPicPr>
+            <p:cNvPr id="14" name="Picture 2">
+              <a:extLst>
+                <a:ext uri="{FF2B5EF4-FFF2-40B4-BE49-F238E27FC236}">
+                  <a16:creationId xmlns:a16="http://schemas.microsoft.com/office/drawing/2014/main" id="{A8152445-CB4F-BCA6-AE6F-2DB7F52120BB}"/>
+                </a:ext>
+              </a:extLst>
+            </p:cNvPr>
+            <p:cNvPicPr>
+              <a:picLocks noChangeAspect="1" noChangeArrowheads="1"/>
+            </p:cNvPicPr>
+            <p:nvPr/>
+          </p:nvPicPr>
+          <p:blipFill>
+            <a:blip r:embed="rId5">
+              <a:extLst>
+                <a:ext uri="{28A0092B-C50C-407E-A947-70E740481C1C}">
+                  <a14:useLocalDpi xmlns:a14="http://schemas.microsoft.com/office/drawing/2010/main" val="0"/>
+                </a:ext>
+              </a:extLst>
+            </a:blip>
+            <a:srcRect/>
+            <a:stretch>
+              <a:fillRect/>
+            </a:stretch>
+          </p:blipFill>
+          <p:spPr bwMode="auto">
+            <a:xfrm>
+              <a:off x="8301287" y="1402965"/>
+              <a:ext cx="2433079" cy="748457"/>
+            </a:xfrm>
+            <a:prstGeom prst="rect">
+              <a:avLst/>
+            </a:prstGeom>
+            <a:noFill/>
+            <a:extLst>
+              <a:ext uri="{909E8E84-426E-40DD-AFC4-6F175D3DCCD1}">
+                <a14:hiddenFill xmlns:a14="http://schemas.microsoft.com/office/drawing/2010/main">
+                  <a:solidFill>
+                    <a:srgbClr val="FFFFFF"/>
+                  </a:solidFill>
+                </a14:hiddenFill>
+              </a:ext>
+            </a:extLst>
+          </p:spPr>
+        </p:pic>
+        <p:sp>
+          <p:nvSpPr>
+            <p:cNvPr id="15" name="TextBox 14">
+              <a:extLst>
+                <a:ext uri="{FF2B5EF4-FFF2-40B4-BE49-F238E27FC236}">
+                  <a16:creationId xmlns:a16="http://schemas.microsoft.com/office/drawing/2014/main" id="{0F430584-5FD7-5CDB-702B-1B90525D3ED4}"/>
+                </a:ext>
+              </a:extLst>
+            </p:cNvPr>
+            <p:cNvSpPr txBox="1"/>
+            <p:nvPr/>
+          </p:nvSpPr>
+          <p:spPr>
+            <a:xfrm>
+              <a:off x="8205909" y="2261886"/>
+              <a:ext cx="861774" cy="1698542"/>
+            </a:xfrm>
+            <a:prstGeom prst="rect">
+              <a:avLst/>
+            </a:prstGeom>
+            <a:noFill/>
+          </p:spPr>
+          <p:txBody>
+            <a:bodyPr vert="vert270" wrap="none" rtlCol="0">
+              <a:spAutoFit/>
+            </a:bodyPr>
+            <a:lstStyle/>
+            <a:p>
+              <a:pPr algn="ctr"/>
+              <a:r>
+                <a:rPr lang="en-US" sz="4400" b="1" dirty="0">
+                  <a:latin typeface="Trade Gothic Inline" panose="020F0502020204030204" pitchFamily="34" charset="0"/>
+                </a:rPr>
+                <a:t>EVGEN</a:t>
+              </a:r>
+            </a:p>
+          </p:txBody>
+        </p:sp>
+        <p:sp>
+          <p:nvSpPr>
+            <p:cNvPr id="16" name="TextBox 15">
+              <a:extLst>
+                <a:ext uri="{FF2B5EF4-FFF2-40B4-BE49-F238E27FC236}">
+                  <a16:creationId xmlns:a16="http://schemas.microsoft.com/office/drawing/2014/main" id="{CB8752C9-C5F4-A458-FDD8-2EBA1D53CDC7}"/>
+                </a:ext>
+              </a:extLst>
+            </p:cNvPr>
+            <p:cNvSpPr txBox="1"/>
+            <p:nvPr/>
+          </p:nvSpPr>
+          <p:spPr>
+            <a:xfrm rot="5400000">
+              <a:off x="9071550" y="3073372"/>
+              <a:ext cx="892552" cy="2433079"/>
+            </a:xfrm>
+            <a:prstGeom prst="rect">
+              <a:avLst/>
+            </a:prstGeom>
+            <a:noFill/>
+          </p:spPr>
+          <p:txBody>
+            <a:bodyPr vert="vert270" wrap="square" rtlCol="0">
+              <a:spAutoFit/>
+            </a:bodyPr>
+            <a:lstStyle/>
+            <a:p>
+              <a:pPr algn="ctr"/>
+              <a:r>
+                <a:rPr lang="en-US" sz="2300" dirty="0">
+                  <a:latin typeface="Bahnschrift SemiBold Condensed" panose="020B0502040204020203" pitchFamily="34" charset="0"/>
+                </a:rPr>
+                <a:t>Event-based Vision in the Era of Generative AI</a:t>
+              </a:r>
+            </a:p>
+          </p:txBody>
+        </p:sp>
+      </p:grpSp>
+    </p:spTree>
+    <p:extLst>
+      <p:ext uri="{BB962C8B-B14F-4D97-AF65-F5344CB8AC3E}">
+        <p14:creationId xmlns:p14="http://schemas.microsoft.com/office/powerpoint/2010/main" val="2594811839"/>
+      </p:ext>
+    </p:extLst>
+  </p:cSld>
+  <p:clrMapOvr>
+    <a:masterClrMapping/>
+  </p:clrMapOvr>
+</p:sld>
+</file>
+
 <file path=ppt/theme/theme1.xml><?xml version="1.0" encoding="utf-8"?>
 <a:theme xmlns:a="http://schemas.openxmlformats.org/drawingml/2006/main" name="Office Theme">
   <a:themeElements>
